--- a/presentation.pptx
+++ b/presentation.pptx
@@ -7,9 +7,9 @@
   <p:sldIdLst>
     <p:sldId id="256" r:id="rId2"/>
     <p:sldId id="257" r:id="rId3"/>
-    <p:sldId id="258" r:id="rId4"/>
-    <p:sldId id="259" r:id="rId5"/>
-    <p:sldId id="260" r:id="rId6"/>
+    <p:sldId id="259" r:id="rId4"/>
+    <p:sldId id="260" r:id="rId5"/>
+    <p:sldId id="258" r:id="rId6"/>
     <p:sldId id="261" r:id="rId7"/>
     <p:sldId id="262" r:id="rId8"/>
     <p:sldId id="263" r:id="rId9"/>
@@ -3660,11 +3660,7 @@
           <a:p>
             <a:r>
               <a:rPr lang="de-DE" dirty="0"/>
-              <a:t>Netz entwickeln, optimieren </a:t>
-            </a:r>
-            <a:r>
-              <a:rPr lang="de-DE"/>
-              <a:t>und trainieren</a:t>
+              <a:t>Netz entwickeln, optimieren und trainieren</a:t>
             </a:r>
           </a:p>
         </p:txBody>
@@ -3704,7 +3700,7 @@
           <p:cNvPr id="2" name="Titel 1">
             <a:extLst>
               <a:ext uri="{FF2B5EF4-FFF2-40B4-BE49-F238E27FC236}">
-                <a16:creationId xmlns:a16="http://schemas.microsoft.com/office/drawing/2014/main" id="{BEEBF655-94AA-4E45-0A36-3A906D929D73}"/>
+                <a16:creationId xmlns:a16="http://schemas.microsoft.com/office/drawing/2014/main" id="{FFA70CFC-B7B6-8A8D-A7D7-B8B418C35569}"/>
               </a:ext>
             </a:extLst>
           </p:cNvPr>
@@ -3721,8 +3717,12 @@
           <a:lstStyle/>
           <a:p>
             <a:r>
+              <a:rPr lang="de-DE" dirty="0" err="1"/>
+              <a:t>Cleaned</a:t>
+            </a:r>
+            <a:r>
               <a:rPr lang="de-DE" dirty="0"/>
-              <a:t>GNNs</a:t>
+              <a:t> Images und Trainingsdaten</a:t>
             </a:r>
           </a:p>
         </p:txBody>
@@ -3732,7 +3732,7 @@
           <p:cNvPr id="3" name="Inhaltsplatzhalter 2">
             <a:extLst>
               <a:ext uri="{FF2B5EF4-FFF2-40B4-BE49-F238E27FC236}">
-                <a16:creationId xmlns:a16="http://schemas.microsoft.com/office/drawing/2014/main" id="{2A4FB7F1-68F3-69B5-3399-3107BF9C9D3F}"/>
+                <a16:creationId xmlns:a16="http://schemas.microsoft.com/office/drawing/2014/main" id="{ADD9296F-56BE-036C-C271-322F3D954DF5}"/>
               </a:ext>
             </a:extLst>
           </p:cNvPr>
@@ -3755,7 +3755,7 @@
     </p:spTree>
     <p:extLst>
       <p:ext uri="{BB962C8B-B14F-4D97-AF65-F5344CB8AC3E}">
-        <p14:creationId xmlns:p14="http://schemas.microsoft.com/office/powerpoint/2010/main" val="3705615394"/>
+        <p14:creationId xmlns:p14="http://schemas.microsoft.com/office/powerpoint/2010/main" val="3270530772"/>
       </p:ext>
     </p:extLst>
   </p:cSld>
@@ -3787,7 +3787,7 @@
           <p:cNvPr id="2" name="Titel 1">
             <a:extLst>
               <a:ext uri="{FF2B5EF4-FFF2-40B4-BE49-F238E27FC236}">
-                <a16:creationId xmlns:a16="http://schemas.microsoft.com/office/drawing/2014/main" id="{FFA70CFC-B7B6-8A8D-A7D7-B8B418C35569}"/>
+                <a16:creationId xmlns:a16="http://schemas.microsoft.com/office/drawing/2014/main" id="{9C3D450A-6037-C853-7EE1-357D22920827}"/>
               </a:ext>
             </a:extLst>
           </p:cNvPr>
@@ -3805,12 +3805,9 @@
           <a:p>
             <a:r>
               <a:rPr lang="de-DE" dirty="0" err="1"/>
-              <a:t>Cleaned</a:t>
-            </a:r>
-            <a:r>
-              <a:rPr lang="de-DE" dirty="0"/>
-              <a:t> Images und Trainingsdaten</a:t>
-            </a:r>
+              <a:t>Preprocessing</a:t>
+            </a:r>
+            <a:endParaRPr lang="de-DE" dirty="0"/>
           </a:p>
         </p:txBody>
       </p:sp>
@@ -3819,7 +3816,7 @@
           <p:cNvPr id="3" name="Inhaltsplatzhalter 2">
             <a:extLst>
               <a:ext uri="{FF2B5EF4-FFF2-40B4-BE49-F238E27FC236}">
-                <a16:creationId xmlns:a16="http://schemas.microsoft.com/office/drawing/2014/main" id="{ADD9296F-56BE-036C-C271-322F3D954DF5}"/>
+                <a16:creationId xmlns:a16="http://schemas.microsoft.com/office/drawing/2014/main" id="{A20EC944-D07E-0730-F0F6-726BB57B5300}"/>
               </a:ext>
             </a:extLst>
           </p:cNvPr>
@@ -3842,7 +3839,7 @@
     </p:spTree>
     <p:extLst>
       <p:ext uri="{BB962C8B-B14F-4D97-AF65-F5344CB8AC3E}">
-        <p14:creationId xmlns:p14="http://schemas.microsoft.com/office/powerpoint/2010/main" val="3270530772"/>
+        <p14:creationId xmlns:p14="http://schemas.microsoft.com/office/powerpoint/2010/main" val="2633264709"/>
       </p:ext>
     </p:extLst>
   </p:cSld>
@@ -3874,7 +3871,7 @@
           <p:cNvPr id="2" name="Titel 1">
             <a:extLst>
               <a:ext uri="{FF2B5EF4-FFF2-40B4-BE49-F238E27FC236}">
-                <a16:creationId xmlns:a16="http://schemas.microsoft.com/office/drawing/2014/main" id="{9C3D450A-6037-C853-7EE1-357D22920827}"/>
+                <a16:creationId xmlns:a16="http://schemas.microsoft.com/office/drawing/2014/main" id="{BEEBF655-94AA-4E45-0A36-3A906D929D73}"/>
               </a:ext>
             </a:extLst>
           </p:cNvPr>
@@ -3891,42 +3888,137 @@
           <a:lstStyle/>
           <a:p>
             <a:r>
+              <a:rPr lang="de-DE" dirty="0"/>
+              <a:t>GNNs</a:t>
+            </a:r>
+          </a:p>
+        </p:txBody>
+      </p:sp>
+      <p:pic>
+        <p:nvPicPr>
+          <p:cNvPr id="9" name="Inhaltsplatzhalter 8">
+            <a:extLst>
+              <a:ext uri="{FF2B5EF4-FFF2-40B4-BE49-F238E27FC236}">
+                <a16:creationId xmlns:a16="http://schemas.microsoft.com/office/drawing/2014/main" id="{0B840337-6A47-326E-A107-7033A1C6DB97}"/>
+              </a:ext>
+            </a:extLst>
+          </p:cNvPr>
+          <p:cNvPicPr>
+            <a:picLocks noGrp="1" noChangeAspect="1"/>
+          </p:cNvPicPr>
+          <p:nvPr>
+            <p:ph idx="1"/>
+          </p:nvPr>
+        </p:nvPicPr>
+        <p:blipFill>
+          <a:blip r:embed="rId2">
+            <a:extLst>
+              <a:ext uri="{28A0092B-C50C-407E-A947-70E740481C1C}">
+                <a14:useLocalDpi xmlns:a14="http://schemas.microsoft.com/office/drawing/2010/main" val="0"/>
+              </a:ext>
+            </a:extLst>
+          </a:blip>
+          <a:stretch>
+            <a:fillRect/>
+          </a:stretch>
+        </p:blipFill>
+        <p:spPr>
+          <a:xfrm>
+            <a:off x="4772025" y="1797030"/>
+            <a:ext cx="7346490" cy="3263940"/>
+          </a:xfrm>
+          <a:prstGeom prst="rect">
+            <a:avLst/>
+          </a:prstGeom>
+        </p:spPr>
+      </p:pic>
+      <p:sp>
+        <p:nvSpPr>
+          <p:cNvPr id="10" name="Textplatzhalter 9">
+            <a:extLst>
+              <a:ext uri="{FF2B5EF4-FFF2-40B4-BE49-F238E27FC236}">
+                <a16:creationId xmlns:a16="http://schemas.microsoft.com/office/drawing/2014/main" id="{692F10B9-AC48-6C16-7C91-30A080030010}"/>
+              </a:ext>
+            </a:extLst>
+          </p:cNvPr>
+          <p:cNvSpPr>
+            <a:spLocks noGrp="1"/>
+          </p:cNvSpPr>
+          <p:nvPr>
+            <p:ph type="body" sz="half" idx="2"/>
+          </p:nvPr>
+        </p:nvSpPr>
+        <p:spPr>
+          <a:xfrm>
+            <a:off x="839788" y="2589212"/>
+            <a:ext cx="3932237" cy="3811588"/>
+          </a:xfrm>
+        </p:spPr>
+        <p:txBody>
+          <a:bodyPr/>
+          <a:lstStyle/>
+          <a:p>
+            <a:pPr marL="285750" indent="-285750">
+              <a:buFont typeface="Arial" panose="020B0604020202020204" pitchFamily="34" charset="0"/>
+              <a:buChar char="•"/>
+            </a:pPr>
+            <a:r>
+              <a:rPr lang="de-DE" dirty="0"/>
+              <a:t>Generalisierter Fall von CNNs</a:t>
+            </a:r>
+          </a:p>
+          <a:p>
+            <a:pPr marL="742950" lvl="1" indent="-285750">
+              <a:buFont typeface="Arial" panose="020B0604020202020204" pitchFamily="34" charset="0"/>
+              <a:buChar char="•"/>
+            </a:pPr>
+            <a:r>
+              <a:rPr lang="de-DE" dirty="0"/>
+              <a:t>Gitter-Struktur (Pixel) -&gt; Graph</a:t>
+            </a:r>
+          </a:p>
+          <a:p>
+            <a:pPr marL="285750" indent="-285750">
+              <a:buFont typeface="Arial" panose="020B0604020202020204" pitchFamily="34" charset="0"/>
+              <a:buChar char="•"/>
+            </a:pPr>
+            <a:r>
+              <a:rPr lang="de-DE" dirty="0"/>
+              <a:t>Faltung -&gt; Message </a:t>
+            </a:r>
+            <a:r>
               <a:rPr lang="de-DE" dirty="0" err="1"/>
-              <a:t>Preprocessing</a:t>
-            </a:r>
-            <a:endParaRPr lang="de-DE" dirty="0"/>
-          </a:p>
-        </p:txBody>
-      </p:sp>
-      <p:sp>
-        <p:nvSpPr>
-          <p:cNvPr id="3" name="Inhaltsplatzhalter 2">
-            <a:extLst>
-              <a:ext uri="{FF2B5EF4-FFF2-40B4-BE49-F238E27FC236}">
-                <a16:creationId xmlns:a16="http://schemas.microsoft.com/office/drawing/2014/main" id="{A20EC944-D07E-0730-F0F6-726BB57B5300}"/>
-              </a:ext>
-            </a:extLst>
-          </p:cNvPr>
-          <p:cNvSpPr>
-            <a:spLocks noGrp="1"/>
-          </p:cNvSpPr>
-          <p:nvPr>
-            <p:ph idx="1"/>
-          </p:nvPr>
-        </p:nvSpPr>
-        <p:spPr/>
-        <p:txBody>
-          <a:bodyPr/>
-          <a:lstStyle/>
-          <a:p>
-            <a:endParaRPr lang="de-DE"/>
+              <a:t>passing</a:t>
+            </a:r>
+            <a:r>
+              <a:rPr lang="de-DE" dirty="0"/>
+              <a:t>: Austausch von Informationen zwischen Knoten</a:t>
+            </a:r>
+          </a:p>
+          <a:p>
+            <a:pPr marL="285750" indent="-285750">
+              <a:buFont typeface="Arial" panose="020B0604020202020204" pitchFamily="34" charset="0"/>
+              <a:buChar char="•"/>
+            </a:pPr>
+            <a:r>
+              <a:rPr lang="de-DE" dirty="0"/>
+              <a:t>Feature </a:t>
+            </a:r>
+            <a:r>
+              <a:rPr lang="de-DE" dirty="0" err="1"/>
+              <a:t>aggregation</a:t>
+            </a:r>
+            <a:r>
+              <a:rPr lang="de-DE" dirty="0"/>
+              <a:t>: ‚zusammenfassen‘ der Informationen über Nachbarn</a:t>
+            </a:r>
           </a:p>
         </p:txBody>
       </p:sp>
     </p:spTree>
     <p:extLst>
       <p:ext uri="{BB962C8B-B14F-4D97-AF65-F5344CB8AC3E}">
-        <p14:creationId xmlns:p14="http://schemas.microsoft.com/office/powerpoint/2010/main" val="2633264709"/>
+        <p14:creationId xmlns:p14="http://schemas.microsoft.com/office/powerpoint/2010/main" val="3705615394"/>
       </p:ext>
     </p:extLst>
   </p:cSld>
